--- a/alx/The-Alexandre-Flyer-1-Page.pptx
+++ b/alx/The-Alexandre-Flyer-1-Page.pptx
@@ -3277,7 +3277,7 @@
         <p:spPr>
           <a:xfrm>
             <a:off x="609600" y="3458051"/>
-            <a:ext cx="3780981" cy="160972"/>
+            <a:ext cx="3852320" cy="160972"/>
           </a:xfrm>
           <a:prstGeom prst="rect">
             <a:avLst/>
@@ -3298,9 +3298,9 @@
                 <a:solidFill>
                   <a:srgbClr val="FFFFFF"/>
                 </a:solidFill>
-                <a:latin typeface="Jost Medium"/>
-                <a:ea typeface="Jost Medium"/>
-                <a:cs typeface="Jost Medium"/>
+                <a:latin typeface="Jost"/>
+                <a:ea typeface="Jost"/>
+                <a:cs typeface="Jost"/>
               </a:rPr>
               <a:t>CONDO FINANCING AT THE ALEXANDRE</a:t>
             </a:r>
@@ -3316,7 +3316,7 @@
         <p:spPr>
           <a:xfrm>
             <a:off x="609600" y="3691636"/>
-            <a:ext cx="6185526" cy="470535"/>
+            <a:ext cx="6302234" cy="470535"/>
           </a:xfrm>
           <a:prstGeom prst="rect">
             <a:avLst/>
@@ -3399,7 +3399,7 @@
         <p:spPr>
           <a:xfrm>
             <a:off x="609600" y="4453860"/>
-            <a:ext cx="1195015" cy="160972"/>
+            <a:ext cx="1217562" cy="160972"/>
           </a:xfrm>
           <a:prstGeom prst="rect">
             <a:avLst/>
@@ -3420,9 +3420,9 @@
                 <a:solidFill>
                   <a:srgbClr val="FFFFFF"/>
                 </a:solidFill>
-                <a:latin typeface="Jost Medium"/>
-                <a:ea typeface="Jost Medium"/>
-                <a:cs typeface="Jost Medium"/>
+                <a:latin typeface="Jost"/>
+                <a:ea typeface="Jost"/>
+                <a:cs typeface="Jost"/>
               </a:rPr>
               <a:t>AS LITTLE AS</a:t>
             </a:r>
@@ -3438,7 +3438,7 @@
         <p:spPr>
           <a:xfrm>
             <a:off x="609600" y="4538573"/>
-            <a:ext cx="1083638" cy="1064895"/>
+            <a:ext cx="1104084" cy="1064895"/>
           </a:xfrm>
           <a:prstGeom prst="rect">
             <a:avLst/>
@@ -3477,7 +3477,7 @@
         <p:spPr>
           <a:xfrm>
             <a:off x="609600" y="5546258"/>
-            <a:ext cx="591740" cy="160972"/>
+            <a:ext cx="610790" cy="160972"/>
           </a:xfrm>
           <a:prstGeom prst="rect">
             <a:avLst/>
@@ -3498,9 +3498,9 @@
                 <a:solidFill>
                   <a:srgbClr val="FFFFFF"/>
                 </a:solidFill>
-                <a:latin typeface="Jost Medium"/>
-                <a:ea typeface="Jost Medium"/>
-                <a:cs typeface="Jost Medium"/>
+                <a:latin typeface="Jost"/>
+                <a:ea typeface="Jost"/>
+                <a:cs typeface="Jost"/>
               </a:rPr>
               <a:t>DOWN</a:t>
             </a:r>
@@ -3560,7 +3560,7 @@
         <p:spPr>
           <a:xfrm>
             <a:off x="2390923" y="4710975"/>
-            <a:ext cx="1683433" cy="148590"/>
+            <a:ext cx="1715196" cy="148590"/>
           </a:xfrm>
           <a:prstGeom prst="rect">
             <a:avLst/>
@@ -3581,9 +3581,9 @@
                 <a:solidFill>
                   <a:srgbClr val="FFFFFF"/>
                 </a:solidFill>
-                <a:latin typeface="Jost Medium"/>
-                <a:ea typeface="Jost Medium"/>
-                <a:cs typeface="Jost Medium"/>
+                <a:latin typeface="Jost"/>
+                <a:ea typeface="Jost"/>
+                <a:cs typeface="Jost"/>
               </a:rPr>
               <a:t>PRIMARY RESIDENCE</a:t>
             </a:r>
@@ -3599,7 +3599,7 @@
         <p:spPr>
           <a:xfrm>
             <a:off x="2390923" y="4947195"/>
-            <a:ext cx="4984200" cy="504825"/>
+            <a:ext cx="5078241" cy="504825"/>
           </a:xfrm>
           <a:prstGeom prst="rect">
             <a:avLst/>
@@ -3620,9 +3620,9 @@
                 <a:solidFill>
                   <a:srgbClr val="FFFFFF"/>
                 </a:solidFill>
-                <a:latin typeface="Jost Light"/>
-                <a:ea typeface="Jost Light"/>
-                <a:cs typeface="Jost Light"/>
+                <a:latin typeface="Jost"/>
+                <a:ea typeface="Jost"/>
+                <a:cs typeface="Jost"/>
               </a:rPr>
               <a:t>Conventional condo financing with as little as 5% down for eligible primary‑residence buyers and units.</a:t>
             </a:r>
@@ -3638,7 +3638,7 @@
         <p:spPr>
           <a:xfrm>
             <a:off x="609600" y="6183630"/>
-            <a:ext cx="1358452" cy="148590"/>
+            <a:ext cx="1384083" cy="148590"/>
           </a:xfrm>
           <a:prstGeom prst="rect">
             <a:avLst/>
@@ -3659,9 +3659,9 @@
                 <a:solidFill>
                   <a:srgbClr val="2D2D2D"/>
                 </a:solidFill>
-                <a:latin typeface="Jost Medium"/>
-                <a:ea typeface="Jost Medium"/>
-                <a:cs typeface="Jost Medium"/>
+                <a:latin typeface="Jost"/>
+                <a:ea typeface="Jost"/>
+                <a:cs typeface="Jost"/>
               </a:rPr>
               <a:t>ALSO AVAILABLE</a:t>
             </a:r>
@@ -3677,7 +3677,7 @@
         <p:spPr>
           <a:xfrm>
             <a:off x="2024508" y="6117907"/>
-            <a:ext cx="3022955" cy="222885"/>
+            <a:ext cx="3079992" cy="222885"/>
           </a:xfrm>
           <a:prstGeom prst="rect">
             <a:avLst/>
@@ -3716,7 +3716,7 @@
         <p:spPr>
           <a:xfrm>
             <a:off x="6140053" y="6161722"/>
-            <a:ext cx="1084111" cy="173355"/>
+            <a:ext cx="1104566" cy="173355"/>
           </a:xfrm>
           <a:prstGeom prst="rect">
             <a:avLst/>
@@ -3779,7 +3779,7 @@
         <p:spPr>
           <a:xfrm>
             <a:off x="1562100" y="6681847"/>
-            <a:ext cx="1027003" cy="136207"/>
+            <a:ext cx="1046380" cy="136207"/>
           </a:xfrm>
           <a:prstGeom prst="rect">
             <a:avLst/>
@@ -3800,9 +3800,9 @@
                 <a:solidFill>
                   <a:srgbClr val="2D2D2D"/>
                 </a:solidFill>
-                <a:latin typeface="Jost Medium"/>
-                <a:ea typeface="Jost Medium"/>
-                <a:cs typeface="Jost Medium"/>
+                <a:latin typeface="Jost"/>
+                <a:ea typeface="Jost"/>
+                <a:cs typeface="Jost"/>
               </a:rPr>
               <a:t>YOUR LENDER</a:t>
             </a:r>
@@ -3818,7 +3818,7 @@
         <p:spPr>
           <a:xfrm>
             <a:off x="1562100" y="6829469"/>
-            <a:ext cx="1622223" cy="272415"/>
+            <a:ext cx="1652831" cy="272415"/>
           </a:xfrm>
           <a:prstGeom prst="rect">
             <a:avLst/>
@@ -3857,7 +3857,7 @@
         <p:spPr>
           <a:xfrm>
             <a:off x="1562100" y="7116633"/>
-            <a:ext cx="1603923" cy="148590"/>
+            <a:ext cx="1634186" cy="148590"/>
           </a:xfrm>
           <a:prstGeom prst="rect">
             <a:avLst/>
@@ -3878,9 +3878,9 @@
                 <a:solidFill>
                   <a:srgbClr val="2D2D2D"/>
                 </a:solidFill>
-                <a:latin typeface="Jost Light"/>
-                <a:ea typeface="Jost Light"/>
-                <a:cs typeface="Jost Light"/>
+                <a:latin typeface="Jost"/>
+                <a:ea typeface="Jost"/>
+                <a:cs typeface="Jost"/>
               </a:rPr>
               <a:t>Loan Officer | NMLS #1934694</a:t>
             </a:r>
@@ -3896,7 +3896,7 @@
         <p:spPr>
           <a:xfrm>
             <a:off x="1562100" y="7307133"/>
-            <a:ext cx="811113" cy="148590"/>
+            <a:ext cx="830163" cy="148590"/>
           </a:xfrm>
           <a:prstGeom prst="rect">
             <a:avLst/>
@@ -3917,9 +3917,9 @@
                 <a:solidFill>
                   <a:srgbClr val="2D2D2D"/>
                 </a:solidFill>
-                <a:latin typeface="Jost Light"/>
-                <a:ea typeface="Jost Light"/>
-                <a:cs typeface="Jost Light"/>
+                <a:latin typeface="Jost"/>
+                <a:ea typeface="Jost"/>
+                <a:cs typeface="Jost"/>
               </a:rPr>
               <a:t>Eustis Mortgage</a:t>
             </a:r>
@@ -3935,7 +3935,7 @@
         <p:spPr>
           <a:xfrm>
             <a:off x="1562100" y="7513826"/>
-            <a:ext cx="866179" cy="173355"/>
+            <a:ext cx="885229" cy="173355"/>
           </a:xfrm>
           <a:prstGeom prst="rect">
             <a:avLst/>
@@ -3974,7 +3974,7 @@
         <p:spPr>
           <a:xfrm>
             <a:off x="1562100" y="7724804"/>
-            <a:ext cx="1401362" cy="160972"/>
+            <a:ext cx="1427803" cy="160972"/>
           </a:xfrm>
           <a:prstGeom prst="rect">
             <a:avLst/>
@@ -3995,9 +3995,9 @@
                 <a:solidFill>
                   <a:srgbClr val="2D2D2D"/>
                 </a:solidFill>
-                <a:latin typeface="Jost Light"/>
-                <a:ea typeface="Jost Light"/>
-                <a:cs typeface="Jost Light"/>
+                <a:latin typeface="Jost"/>
+                <a:ea typeface="Jost"/>
+                <a:cs typeface="Jost"/>
               </a:rPr>
               <a:t>nate@eustismortgage.com</a:t>
             </a:r>
@@ -4061,7 +4061,7 @@
         <p:spPr>
           <a:xfrm>
             <a:off x="3560712" y="7900481"/>
-            <a:ext cx="1015960" cy="111442"/>
+            <a:ext cx="1035129" cy="111442"/>
           </a:xfrm>
           <a:prstGeom prst="rect">
             <a:avLst/>
@@ -4082,9 +4082,9 @@
                 <a:solidFill>
                   <a:srgbClr val="2D2D2D"/>
                 </a:solidFill>
-                <a:latin typeface="Jost Medium"/>
-                <a:ea typeface="Jost Medium"/>
-                <a:cs typeface="Jost Medium"/>
+                <a:latin typeface="Jost"/>
+                <a:ea typeface="Jost"/>
+                <a:cs typeface="Jost"/>
               </a:rPr>
               <a:t>APPLY WITH NATE</a:t>
             </a:r>
@@ -4168,7 +4168,7 @@
         <p:spPr>
           <a:xfrm>
             <a:off x="5614541" y="6681847"/>
-            <a:ext cx="1361449" cy="136207"/>
+            <a:ext cx="1387137" cy="136207"/>
           </a:xfrm>
           <a:prstGeom prst="rect">
             <a:avLst/>
@@ -4189,9 +4189,9 @@
                 <a:solidFill>
                   <a:srgbClr val="2D2D2D"/>
                 </a:solidFill>
-                <a:latin typeface="Jost Medium"/>
-                <a:ea typeface="Jost Medium"/>
-                <a:cs typeface="Jost Medium"/>
+                <a:latin typeface="Jost"/>
+                <a:ea typeface="Jost"/>
+                <a:cs typeface="Jost"/>
               </a:rPr>
               <a:t>TOURS AND UNITS</a:t>
             </a:r>
@@ -4207,7 +4207,7 @@
         <p:spPr>
           <a:xfrm>
             <a:off x="5614541" y="6844724"/>
-            <a:ext cx="1319328" cy="210502"/>
+            <a:ext cx="1344221" cy="210502"/>
           </a:xfrm>
           <a:prstGeom prst="rect">
             <a:avLst/>
@@ -4246,7 +4246,7 @@
         <p:spPr>
           <a:xfrm>
             <a:off x="5614541" y="7083802"/>
-            <a:ext cx="783133" cy="160972"/>
+            <a:ext cx="802183" cy="160972"/>
           </a:xfrm>
           <a:prstGeom prst="rect">
             <a:avLst/>
@@ -4267,9 +4267,9 @@
                 <a:solidFill>
                   <a:srgbClr val="2D2D2D"/>
                 </a:solidFill>
-                <a:latin typeface="Jost Light"/>
-                <a:ea typeface="Jost Light"/>
-                <a:cs typeface="Jost Light"/>
+                <a:latin typeface="Jost"/>
+                <a:ea typeface="Jost"/>
+                <a:cs typeface="Jost"/>
               </a:rPr>
               <a:t>504-232-8199</a:t>
             </a:r>
@@ -4285,7 +4285,7 @@
         <p:spPr>
           <a:xfrm>
             <a:off x="4928741" y="7331452"/>
-            <a:ext cx="1808693" cy="160972"/>
+            <a:ext cx="1842819" cy="160972"/>
           </a:xfrm>
           <a:prstGeom prst="rect">
             <a:avLst/>
@@ -4348,7 +4348,7 @@
         <p:spPr>
           <a:xfrm>
             <a:off x="609600" y="8729275"/>
-            <a:ext cx="2557411" cy="136207"/>
+            <a:ext cx="2605664" cy="136207"/>
           </a:xfrm>
           <a:prstGeom prst="rect">
             <a:avLst/>
@@ -4369,9 +4369,9 @@
                 <a:solidFill>
                   <a:srgbClr val="555555"/>
                 </a:solidFill>
-                <a:latin typeface="Jost Medium"/>
-                <a:ea typeface="Jost Medium"/>
-                <a:cs typeface="Jost Medium"/>
+                <a:latin typeface="Jost"/>
+                <a:ea typeface="Jost"/>
+                <a:cs typeface="Jost"/>
               </a:rPr>
               <a:t>FINANCING BY EUSTIS MORTGAGE</a:t>
             </a:r>
@@ -4411,7 +4411,7 @@
         <p:spPr>
           <a:xfrm>
             <a:off x="904875" y="9004548"/>
-            <a:ext cx="907702" cy="252412"/>
+            <a:ext cx="926752" cy="252412"/>
           </a:xfrm>
           <a:prstGeom prst="rect">
             <a:avLst/>
@@ -4432,9 +4432,9 @@
                 <a:solidFill>
                   <a:srgbClr val="555555"/>
                 </a:solidFill>
-                <a:latin typeface="Jost Medium"/>
-                <a:ea typeface="Jost Medium"/>
-                <a:cs typeface="Jost Medium"/>
+                <a:latin typeface="Jost"/>
+                <a:ea typeface="Jost"/>
+                <a:cs typeface="Jost"/>
               </a:rPr>
               <a:t>EQUAL HOUSING</a:t>
             </a:r>
@@ -4450,9 +4450,9 @@
                 <a:solidFill>
                   <a:srgbClr val="555555"/>
                 </a:solidFill>
-                <a:latin typeface="Jost Medium"/>
-                <a:ea typeface="Jost Medium"/>
-                <a:cs typeface="Jost Medium"/>
+                <a:latin typeface="Jost"/>
+                <a:ea typeface="Jost"/>
+                <a:cs typeface="Jost"/>
               </a:rPr>
               <a:t>OPPORTUNITY</a:t>
             </a:r>
@@ -4468,7 +4468,7 @@
         <p:spPr>
           <a:xfrm>
             <a:off x="1969442" y="8930729"/>
-            <a:ext cx="5448481" cy="400050"/>
+            <a:ext cx="5551283" cy="400050"/>
           </a:xfrm>
           <a:prstGeom prst="rect">
             <a:avLst/>
@@ -4507,7 +4507,7 @@
         <p:spPr>
           <a:xfrm>
             <a:off x="609600" y="9383166"/>
-            <a:ext cx="6871614" cy="386655"/>
+            <a:ext cx="7001267" cy="386655"/>
           </a:xfrm>
           <a:prstGeom prst="rect">
             <a:avLst/>

--- a/alx/The-Alexandre-Flyer-1-Page.pptx
+++ b/alx/The-Alexandre-Flyer-1-Page.pptx
@@ -3277,7 +3277,7 @@
         <p:spPr>
           <a:xfrm>
             <a:off x="609600" y="3458051"/>
-            <a:ext cx="3852320" cy="160972"/>
+            <a:ext cx="4351695" cy="160972"/>
           </a:xfrm>
           <a:prstGeom prst="rect">
             <a:avLst/>
@@ -3298,9 +3298,9 @@
                 <a:solidFill>
                   <a:srgbClr val="FFFFFF"/>
                 </a:solidFill>
-                <a:latin typeface="Jost"/>
-                <a:ea typeface="Jost"/>
-                <a:cs typeface="Jost"/>
+                <a:latin typeface="Futura"/>
+                <a:ea typeface="Futura"/>
+                <a:cs typeface="Futura"/>
               </a:rPr>
               <a:t>CONDO FINANCING AT THE ALEXANDRE</a:t>
             </a:r>
@@ -3316,7 +3316,7 @@
         <p:spPr>
           <a:xfrm>
             <a:off x="609600" y="3691636"/>
-            <a:ext cx="6302234" cy="470535"/>
+            <a:ext cx="7119190" cy="470535"/>
           </a:xfrm>
           <a:prstGeom prst="rect">
             <a:avLst/>
@@ -3399,7 +3399,7 @@
         <p:spPr>
           <a:xfrm>
             <a:off x="609600" y="4453860"/>
-            <a:ext cx="1217562" cy="160972"/>
+            <a:ext cx="1375395" cy="160972"/>
           </a:xfrm>
           <a:prstGeom prst="rect">
             <a:avLst/>
@@ -3420,9 +3420,9 @@
                 <a:solidFill>
                   <a:srgbClr val="FFFFFF"/>
                 </a:solidFill>
-                <a:latin typeface="Jost"/>
-                <a:ea typeface="Jost"/>
-                <a:cs typeface="Jost"/>
+                <a:latin typeface="Futura"/>
+                <a:ea typeface="Futura"/>
+                <a:cs typeface="Futura"/>
               </a:rPr>
               <a:t>AS LITTLE AS</a:t>
             </a:r>
@@ -3438,7 +3438,7 @@
         <p:spPr>
           <a:xfrm>
             <a:off x="609600" y="4538573"/>
-            <a:ext cx="1104084" cy="1064895"/>
+            <a:ext cx="1247206" cy="1064895"/>
           </a:xfrm>
           <a:prstGeom prst="rect">
             <a:avLst/>
@@ -3477,7 +3477,7 @@
         <p:spPr>
           <a:xfrm>
             <a:off x="609600" y="5546258"/>
-            <a:ext cx="610790" cy="160972"/>
+            <a:ext cx="652200" cy="160972"/>
           </a:xfrm>
           <a:prstGeom prst="rect">
             <a:avLst/>
@@ -3498,9 +3498,9 @@
                 <a:solidFill>
                   <a:srgbClr val="FFFFFF"/>
                 </a:solidFill>
-                <a:latin typeface="Jost"/>
-                <a:ea typeface="Jost"/>
-                <a:cs typeface="Jost"/>
+                <a:latin typeface="Futura"/>
+                <a:ea typeface="Futura"/>
+                <a:cs typeface="Futura"/>
               </a:rPr>
               <a:t>DOWN</a:t>
             </a:r>
@@ -3560,7 +3560,7 @@
         <p:spPr>
           <a:xfrm>
             <a:off x="2390923" y="4710975"/>
-            <a:ext cx="1715196" cy="148590"/>
+            <a:ext cx="1937536" cy="148590"/>
           </a:xfrm>
           <a:prstGeom prst="rect">
             <a:avLst/>
@@ -3581,9 +3581,9 @@
                 <a:solidFill>
                   <a:srgbClr val="FFFFFF"/>
                 </a:solidFill>
-                <a:latin typeface="Jost"/>
-                <a:ea typeface="Jost"/>
-                <a:cs typeface="Jost"/>
+                <a:latin typeface="Futura"/>
+                <a:ea typeface="Futura"/>
+                <a:cs typeface="Futura"/>
               </a:rPr>
               <a:t>PRIMARY RESIDENCE</a:t>
             </a:r>
@@ -3599,7 +3599,7 @@
         <p:spPr>
           <a:xfrm>
             <a:off x="2390923" y="4947195"/>
-            <a:ext cx="5078241" cy="504825"/>
+            <a:ext cx="4984200" cy="504825"/>
           </a:xfrm>
           <a:prstGeom prst="rect">
             <a:avLst/>
@@ -3620,9 +3620,9 @@
                 <a:solidFill>
                   <a:srgbClr val="FFFFFF"/>
                 </a:solidFill>
-                <a:latin typeface="Jost"/>
-                <a:ea typeface="Jost"/>
-                <a:cs typeface="Jost"/>
+                <a:latin typeface="Futura"/>
+                <a:ea typeface="Futura"/>
+                <a:cs typeface="Futura"/>
               </a:rPr>
               <a:t>Conventional condo financing with as little as 5% down for eligible primary‑residence buyers and units.</a:t>
             </a:r>
@@ -3638,7 +3638,7 @@
         <p:spPr>
           <a:xfrm>
             <a:off x="609600" y="6183630"/>
-            <a:ext cx="1384083" cy="148590"/>
+            <a:ext cx="1563501" cy="148590"/>
           </a:xfrm>
           <a:prstGeom prst="rect">
             <a:avLst/>
@@ -3659,9 +3659,9 @@
                 <a:solidFill>
                   <a:srgbClr val="2D2D2D"/>
                 </a:solidFill>
-                <a:latin typeface="Jost"/>
-                <a:ea typeface="Jost"/>
-                <a:cs typeface="Jost"/>
+                <a:latin typeface="Futura"/>
+                <a:ea typeface="Futura"/>
+                <a:cs typeface="Futura"/>
               </a:rPr>
               <a:t>ALSO AVAILABLE</a:t>
             </a:r>
@@ -3677,7 +3677,7 @@
         <p:spPr>
           <a:xfrm>
             <a:off x="2024508" y="6117907"/>
-            <a:ext cx="3079992" cy="222885"/>
+            <a:ext cx="3479250" cy="222885"/>
           </a:xfrm>
           <a:prstGeom prst="rect">
             <a:avLst/>
@@ -3716,7 +3716,7 @@
         <p:spPr>
           <a:xfrm>
             <a:off x="6140053" y="6161722"/>
-            <a:ext cx="1104566" cy="173355"/>
+            <a:ext cx="1247751" cy="173355"/>
           </a:xfrm>
           <a:prstGeom prst="rect">
             <a:avLst/>
@@ -3737,9 +3737,9 @@
                 <a:solidFill>
                   <a:srgbClr val="2D2D2D"/>
                 </a:solidFill>
-                <a:latin typeface="Jost"/>
-                <a:ea typeface="Jost"/>
-                <a:cs typeface="Jost"/>
+                <a:latin typeface="Futura"/>
+                <a:ea typeface="Futura"/>
+                <a:cs typeface="Futura"/>
               </a:rPr>
               <a:t>Contact for details</a:t>
             </a:r>
@@ -3779,7 +3779,7 @@
         <p:spPr>
           <a:xfrm>
             <a:off x="1562100" y="6681847"/>
-            <a:ext cx="1046380" cy="136207"/>
+            <a:ext cx="1182022" cy="136207"/>
           </a:xfrm>
           <a:prstGeom prst="rect">
             <a:avLst/>
@@ -3800,9 +3800,9 @@
                 <a:solidFill>
                   <a:srgbClr val="2D2D2D"/>
                 </a:solidFill>
-                <a:latin typeface="Jost"/>
-                <a:ea typeface="Jost"/>
-                <a:cs typeface="Jost"/>
+                <a:latin typeface="Futura"/>
+                <a:ea typeface="Futura"/>
+                <a:cs typeface="Futura"/>
               </a:rPr>
               <a:t>YOUR LENDER</a:t>
             </a:r>
@@ -3818,7 +3818,7 @@
         <p:spPr>
           <a:xfrm>
             <a:off x="1562100" y="6829469"/>
-            <a:ext cx="1652831" cy="272415"/>
+            <a:ext cx="1867087" cy="272415"/>
           </a:xfrm>
           <a:prstGeom prst="rect">
             <a:avLst/>
@@ -3857,7 +3857,7 @@
         <p:spPr>
           <a:xfrm>
             <a:off x="1562100" y="7116633"/>
-            <a:ext cx="1634186" cy="148590"/>
+            <a:ext cx="1846025" cy="148590"/>
           </a:xfrm>
           <a:prstGeom prst="rect">
             <a:avLst/>
@@ -3878,9 +3878,9 @@
                 <a:solidFill>
                   <a:srgbClr val="2D2D2D"/>
                 </a:solidFill>
-                <a:latin typeface="Jost"/>
-                <a:ea typeface="Jost"/>
-                <a:cs typeface="Jost"/>
+                <a:latin typeface="Futura"/>
+                <a:ea typeface="Futura"/>
+                <a:cs typeface="Futura"/>
               </a:rPr>
               <a:t>Loan Officer | NMLS #1934694</a:t>
             </a:r>
@@ -3896,7 +3896,7 @@
         <p:spPr>
           <a:xfrm>
             <a:off x="1562100" y="7307133"/>
-            <a:ext cx="830163" cy="148590"/>
+            <a:ext cx="919835" cy="148590"/>
           </a:xfrm>
           <a:prstGeom prst="rect">
             <a:avLst/>
@@ -3917,9 +3917,9 @@
                 <a:solidFill>
                   <a:srgbClr val="2D2D2D"/>
                 </a:solidFill>
-                <a:latin typeface="Jost"/>
-                <a:ea typeface="Jost"/>
-                <a:cs typeface="Jost"/>
+                <a:latin typeface="Futura"/>
+                <a:ea typeface="Futura"/>
+                <a:cs typeface="Futura"/>
               </a:rPr>
               <a:t>Eustis Mortgage</a:t>
             </a:r>
@@ -3935,7 +3935,7 @@
         <p:spPr>
           <a:xfrm>
             <a:off x="1562100" y="7513826"/>
-            <a:ext cx="885229" cy="173355"/>
+            <a:ext cx="987016" cy="173355"/>
           </a:xfrm>
           <a:prstGeom prst="rect">
             <a:avLst/>
@@ -3956,9 +3956,9 @@
                 <a:solidFill>
                   <a:srgbClr val="2D2D2D"/>
                 </a:solidFill>
-                <a:latin typeface="Jost"/>
-                <a:ea typeface="Jost"/>
-                <a:cs typeface="Jost"/>
+                <a:latin typeface="Futura"/>
+                <a:ea typeface="Futura"/>
+                <a:cs typeface="Futura"/>
               </a:rPr>
               <a:t>504.418.3416</a:t>
             </a:r>
@@ -3974,7 +3974,7 @@
         <p:spPr>
           <a:xfrm>
             <a:off x="1562100" y="7724804"/>
-            <a:ext cx="1427803" cy="160972"/>
+            <a:ext cx="1612889" cy="160972"/>
           </a:xfrm>
           <a:prstGeom prst="rect">
             <a:avLst/>
@@ -3995,9 +3995,9 @@
                 <a:solidFill>
                   <a:srgbClr val="2D2D2D"/>
                 </a:solidFill>
-                <a:latin typeface="Jost"/>
-                <a:ea typeface="Jost"/>
-                <a:cs typeface="Jost"/>
+                <a:latin typeface="Futura"/>
+                <a:ea typeface="Futura"/>
+                <a:cs typeface="Futura"/>
               </a:rPr>
               <a:t>nate@eustismortgage.com</a:t>
             </a:r>
@@ -4061,7 +4061,7 @@
         <p:spPr>
           <a:xfrm>
             <a:off x="3560712" y="7900481"/>
-            <a:ext cx="1035129" cy="111442"/>
+            <a:ext cx="1169312" cy="111442"/>
           </a:xfrm>
           <a:prstGeom prst="rect">
             <a:avLst/>
@@ -4082,9 +4082,9 @@
                 <a:solidFill>
                   <a:srgbClr val="2D2D2D"/>
                 </a:solidFill>
-                <a:latin typeface="Jost"/>
-                <a:ea typeface="Jost"/>
-                <a:cs typeface="Jost"/>
+                <a:latin typeface="Futura"/>
+                <a:ea typeface="Futura"/>
+                <a:cs typeface="Futura"/>
               </a:rPr>
               <a:t>APPLY WITH NATE</a:t>
             </a:r>
@@ -4168,7 +4168,7 @@
         <p:spPr>
           <a:xfrm>
             <a:off x="5614541" y="6681847"/>
-            <a:ext cx="1387137" cy="136207"/>
+            <a:ext cx="1566951" cy="136207"/>
           </a:xfrm>
           <a:prstGeom prst="rect">
             <a:avLst/>
@@ -4189,9 +4189,9 @@
                 <a:solidFill>
                   <a:srgbClr val="2D2D2D"/>
                 </a:solidFill>
-                <a:latin typeface="Jost"/>
-                <a:ea typeface="Jost"/>
-                <a:cs typeface="Jost"/>
+                <a:latin typeface="Futura"/>
+                <a:ea typeface="Futura"/>
+                <a:cs typeface="Futura"/>
               </a:rPr>
               <a:t>TOURS AND UNITS</a:t>
             </a:r>
@@ -4207,7 +4207,7 @@
         <p:spPr>
           <a:xfrm>
             <a:off x="5614541" y="6844724"/>
-            <a:ext cx="1344221" cy="210502"/>
+            <a:ext cx="1518472" cy="210502"/>
           </a:xfrm>
           <a:prstGeom prst="rect">
             <a:avLst/>
@@ -4246,7 +4246,7 @@
         <p:spPr>
           <a:xfrm>
             <a:off x="5614541" y="7083802"/>
-            <a:ext cx="802183" cy="160972"/>
+            <a:ext cx="885699" cy="160972"/>
           </a:xfrm>
           <a:prstGeom prst="rect">
             <a:avLst/>
@@ -4267,9 +4267,9 @@
                 <a:solidFill>
                   <a:srgbClr val="2D2D2D"/>
                 </a:solidFill>
-                <a:latin typeface="Jost"/>
-                <a:ea typeface="Jost"/>
-                <a:cs typeface="Jost"/>
+                <a:latin typeface="Futura"/>
+                <a:ea typeface="Futura"/>
+                <a:cs typeface="Futura"/>
               </a:rPr>
               <a:t>504-232-8199</a:t>
             </a:r>
@@ -4285,7 +4285,7 @@
         <p:spPr>
           <a:xfrm>
             <a:off x="4928741" y="7331452"/>
-            <a:ext cx="1842819" cy="160972"/>
+            <a:ext cx="2081703" cy="160972"/>
           </a:xfrm>
           <a:prstGeom prst="rect">
             <a:avLst/>
@@ -4348,7 +4348,7 @@
         <p:spPr>
           <a:xfrm>
             <a:off x="609600" y="8729275"/>
-            <a:ext cx="2605664" cy="136207"/>
+            <a:ext cx="2943436" cy="136207"/>
           </a:xfrm>
           <a:prstGeom prst="rect">
             <a:avLst/>
@@ -4369,9 +4369,9 @@
                 <a:solidFill>
                   <a:srgbClr val="555555"/>
                 </a:solidFill>
-                <a:latin typeface="Jost"/>
-                <a:ea typeface="Jost"/>
-                <a:cs typeface="Jost"/>
+                <a:latin typeface="Futura"/>
+                <a:ea typeface="Futura"/>
+                <a:cs typeface="Futura"/>
               </a:rPr>
               <a:t>FINANCING BY EUSTIS MORTGAGE</a:t>
             </a:r>
@@ -4411,7 +4411,7 @@
         <p:spPr>
           <a:xfrm>
             <a:off x="904875" y="9004548"/>
-            <a:ext cx="926752" cy="252412"/>
+            <a:ext cx="945802" cy="252412"/>
           </a:xfrm>
           <a:prstGeom prst="rect">
             <a:avLst/>
@@ -4432,9 +4432,9 @@
                 <a:solidFill>
                   <a:srgbClr val="555555"/>
                 </a:solidFill>
-                <a:latin typeface="Jost"/>
-                <a:ea typeface="Jost"/>
-                <a:cs typeface="Jost"/>
+                <a:latin typeface="Futura"/>
+                <a:ea typeface="Futura"/>
+                <a:cs typeface="Futura"/>
               </a:rPr>
               <a:t>EQUAL HOUSING</a:t>
             </a:r>
@@ -4450,9 +4450,9 @@
                 <a:solidFill>
                   <a:srgbClr val="555555"/>
                 </a:solidFill>
-                <a:latin typeface="Jost"/>
-                <a:ea typeface="Jost"/>
-                <a:cs typeface="Jost"/>
+                <a:latin typeface="Futura"/>
+                <a:ea typeface="Futura"/>
+                <a:cs typeface="Futura"/>
               </a:rPr>
               <a:t>OPPORTUNITY</a:t>
             </a:r>
@@ -4468,7 +4468,7 @@
         <p:spPr>
           <a:xfrm>
             <a:off x="1969442" y="8930729"/>
-            <a:ext cx="5551283" cy="400050"/>
+            <a:ext cx="5448481" cy="400050"/>
           </a:xfrm>
           <a:prstGeom prst="rect">
             <a:avLst/>
@@ -4489,9 +4489,9 @@
                 <a:solidFill>
                   <a:srgbClr val="555555"/>
                 </a:solidFill>
-                <a:latin typeface="Jost"/>
-                <a:ea typeface="Jost"/>
-                <a:cs typeface="Jost"/>
+                <a:latin typeface="Futura"/>
+                <a:ea typeface="Futura"/>
+                <a:cs typeface="Futura"/>
               </a:rPr>
               <a:t>CONVENTIONAL FINANCING OFFERED BY EUSTIS MORTGAGE CORPORATION. NOT A COMMITMENT TO LEND. ALL BORROWERS ARE SUBJECT TO CREDIT APPROVAL. RATES AND TERMS MAY CHANGE AT ANYTIME WITHOUT NOTICE. NMLS #70345</a:t>
             </a:r>
@@ -4507,7 +4507,7 @@
         <p:spPr>
           <a:xfrm>
             <a:off x="609600" y="9383166"/>
-            <a:ext cx="7001267" cy="386655"/>
+            <a:ext cx="6871614" cy="386655"/>
           </a:xfrm>
           <a:prstGeom prst="rect">
             <a:avLst/>
@@ -4528,9 +4528,9 @@
                 <a:solidFill>
                   <a:srgbClr val="555555"/>
                 </a:solidFill>
-                <a:latin typeface="Jost"/>
-                <a:ea typeface="Jost"/>
-                <a:cs typeface="Jost"/>
+                <a:latin typeface="Futura"/>
+                <a:ea typeface="Futura"/>
+                <a:cs typeface="Futura"/>
               </a:rPr>
               <a:t>Payment example: For a sales price of $365,000 with 5% down, a loan amount of $346,750 on a 30-year fixed conventional loan at a 7.500% interest rate (8.000% APR) would have 360 monthly principal and interest payments of approximately $2,424.53. Payment shown is principal and interest only and excludes taxes, insurance, PMI, and HOA dues; the actual payment will be higher. Rates are for example only, are not a quote, and are subject to change.</a:t>
             </a:r>

--- a/alx/The-Alexandre-Flyer-1-Page.pptx
+++ b/alx/The-Alexandre-Flyer-1-Page.pptx
@@ -3762,7 +3762,7 @@
         </p:blipFill>
         <p:spPr>
           <a:xfrm>
-            <a:off x="609600" y="7122765"/>
+            <a:off x="609600" y="7084665"/>
             <a:ext cx="819150" cy="819150"/>
           </a:xfrm>
           <a:prstGeom prst="rect">
@@ -3778,7 +3778,7 @@
         </p:nvSpPr>
         <p:spPr>
           <a:xfrm>
-            <a:off x="1562100" y="6681847"/>
+            <a:off x="1562100" y="6643747"/>
             <a:ext cx="1182022" cy="136207"/>
           </a:xfrm>
           <a:prstGeom prst="rect">
@@ -3817,7 +3817,7 @@
         </p:nvSpPr>
         <p:spPr>
           <a:xfrm>
-            <a:off x="1562100" y="6829469"/>
+            <a:off x="1562100" y="6791369"/>
             <a:ext cx="1867087" cy="272415"/>
           </a:xfrm>
           <a:prstGeom prst="rect">
@@ -3856,7 +3856,7 @@
         </p:nvSpPr>
         <p:spPr>
           <a:xfrm>
-            <a:off x="1562100" y="7116633"/>
+            <a:off x="1562100" y="7078533"/>
             <a:ext cx="1846025" cy="148590"/>
           </a:xfrm>
           <a:prstGeom prst="rect">
@@ -3895,7 +3895,7 @@
         </p:nvSpPr>
         <p:spPr>
           <a:xfrm>
-            <a:off x="1562100" y="7307133"/>
+            <a:off x="1562100" y="7269033"/>
             <a:ext cx="919835" cy="148590"/>
           </a:xfrm>
           <a:prstGeom prst="rect">
@@ -3934,7 +3934,7 @@
         </p:nvSpPr>
         <p:spPr>
           <a:xfrm>
-            <a:off x="1562100" y="7513826"/>
+            <a:off x="1562100" y="7475726"/>
             <a:ext cx="987016" cy="173355"/>
           </a:xfrm>
           <a:prstGeom prst="rect">
@@ -3973,7 +3973,7 @@
         </p:nvSpPr>
         <p:spPr>
           <a:xfrm>
-            <a:off x="1562100" y="7724804"/>
+            <a:off x="1562100" y="7686704"/>
             <a:ext cx="1612889" cy="160972"/>
           </a:xfrm>
           <a:prstGeom prst="rect">
@@ -4020,7 +4020,7 @@
         </p:blipFill>
         <p:spPr>
           <a:xfrm>
-            <a:off x="1562100" y="8010078"/>
+            <a:off x="1562100" y="7971978"/>
             <a:ext cx="999083" cy="381000"/>
           </a:xfrm>
           <a:prstGeom prst="rect">
@@ -4044,7 +4044,7 @@
         </p:blipFill>
         <p:spPr>
           <a:xfrm>
-            <a:off x="3639889" y="7046565"/>
+            <a:off x="3639889" y="7008465"/>
             <a:ext cx="800100" cy="800100"/>
           </a:xfrm>
           <a:prstGeom prst="rect">
@@ -4060,7 +4060,7 @@
         </p:nvSpPr>
         <p:spPr>
           <a:xfrm>
-            <a:off x="3560712" y="7900481"/>
+            <a:off x="3560712" y="7862381"/>
             <a:ext cx="1169312" cy="111442"/>
           </a:xfrm>
           <a:prstGeom prst="rect">
@@ -4099,7 +4099,7 @@
         </p:nvSpPr>
         <p:spPr>
           <a:xfrm>
-            <a:off x="4728716" y="6673750"/>
+            <a:off x="4728716" y="6635650"/>
             <a:ext cx="9525" cy="1717327"/>
           </a:xfrm>
           <a:prstGeom prst="rect">
@@ -4151,7 +4151,7 @@
         </p:blipFill>
         <p:spPr>
           <a:xfrm>
-            <a:off x="4928741" y="6678513"/>
+            <a:off x="4928741" y="6640413"/>
             <a:ext cx="571500" cy="571500"/>
           </a:xfrm>
           <a:prstGeom prst="rect">
@@ -4167,7 +4167,7 @@
         </p:nvSpPr>
         <p:spPr>
           <a:xfrm>
-            <a:off x="5614541" y="6681847"/>
+            <a:off x="5614541" y="6643747"/>
             <a:ext cx="1566951" cy="136207"/>
           </a:xfrm>
           <a:prstGeom prst="rect">
@@ -4206,7 +4206,7 @@
         </p:nvSpPr>
         <p:spPr>
           <a:xfrm>
-            <a:off x="5614541" y="6844724"/>
+            <a:off x="5614541" y="6806624"/>
             <a:ext cx="1518472" cy="210502"/>
           </a:xfrm>
           <a:prstGeom prst="rect">
@@ -4245,7 +4245,7 @@
         </p:nvSpPr>
         <p:spPr>
           <a:xfrm>
-            <a:off x="5614541" y="7083802"/>
+            <a:off x="5614541" y="7045702"/>
             <a:ext cx="885699" cy="160972"/>
           </a:xfrm>
           <a:prstGeom prst="rect">
@@ -4284,7 +4284,7 @@
         </p:nvSpPr>
         <p:spPr>
           <a:xfrm>
-            <a:off x="4928741" y="7331452"/>
+            <a:off x="4928741" y="7293352"/>
             <a:ext cx="2081703" cy="160972"/>
           </a:xfrm>
           <a:prstGeom prst="rect">
@@ -4331,7 +4331,7 @@
         </p:blipFill>
         <p:spPr>
           <a:xfrm>
-            <a:off x="4928741" y="7607200"/>
+            <a:off x="4928741" y="7569100"/>
             <a:ext cx="1272778" cy="400050"/>
           </a:xfrm>
           <a:prstGeom prst="rect">
@@ -4347,7 +4347,7 @@
         </p:nvSpPr>
         <p:spPr>
           <a:xfrm>
-            <a:off x="609600" y="8729275"/>
+            <a:off x="609600" y="8653075"/>
             <a:ext cx="2943436" cy="136207"/>
           </a:xfrm>
           <a:prstGeom prst="rect">
@@ -4378,9 +4378,48 @@
           </a:p>
         </p:txBody>
       </p:sp>
+      <p:sp>
+        <p:nvSpPr>
+          <p:cNvPr id="37" name="TextBox 36"/>
+          <p:cNvSpPr txBox="1"/>
+          <p:nvPr/>
+        </p:nvSpPr>
+        <p:spPr>
+          <a:xfrm>
+            <a:off x="609600" y="8866435"/>
+            <a:ext cx="3148066" cy="123825"/>
+          </a:xfrm>
+          <a:prstGeom prst="rect">
+            <a:avLst/>
+          </a:prstGeom>
+          <a:noFill/>
+        </p:spPr>
+        <p:txBody>
+          <a:bodyPr wrap="none" lIns="0" rIns="0" tIns="0" bIns="0" anchor="ctr"/>
+          <a:lstStyle/>
+          <a:p>
+            <a:pPr algn="l">
+              <a:lnSpc>
+                <a:spcPct val="100000"/>
+              </a:lnSpc>
+            </a:pPr>
+            <a:r>
+              <a:rPr sz="750" b="0" i="0">
+                <a:solidFill>
+                  <a:srgbClr val="555555"/>
+                </a:solidFill>
+                <a:latin typeface="Futura"/>
+                <a:ea typeface="Futura"/>
+                <a:cs typeface="Futura"/>
+              </a:rPr>
+              <a:t>Conventional financing offered by Eustis Mortgage Corporation.</a:t>
+            </a:r>
+          </a:p>
+        </p:txBody>
+      </p:sp>
       <p:pic>
         <p:nvPicPr>
-          <p:cNvPr id="37" name="Picture 36" descr="snap36.png"/>
+          <p:cNvPr id="38" name="Picture 37" descr="img37.png"/>
           <p:cNvPicPr>
             <a:picLocks noChangeAspect="1"/>
           </p:cNvPicPr>
@@ -4394,8 +4433,8 @@
         </p:blipFill>
         <p:spPr>
           <a:xfrm>
-            <a:off x="609600" y="9023598"/>
-            <a:ext cx="238125" cy="219075"/>
+            <a:off x="609600" y="9040266"/>
+            <a:ext cx="4962525" cy="285750"/>
           </a:xfrm>
           <a:prstGeom prst="rect">
             <a:avLst/>
@@ -4404,103 +4443,7 @@
       </p:pic>
       <p:sp>
         <p:nvSpPr>
-          <p:cNvPr id="38" name="TextBox 37"/>
-          <p:cNvSpPr txBox="1"/>
-          <p:nvPr/>
-        </p:nvSpPr>
-        <p:spPr>
-          <a:xfrm>
-            <a:off x="904875" y="9004548"/>
-            <a:ext cx="945802" cy="252412"/>
-          </a:xfrm>
-          <a:prstGeom prst="rect">
-            <a:avLst/>
-          </a:prstGeom>
-          <a:noFill/>
-        </p:spPr>
-        <p:txBody>
-          <a:bodyPr wrap="square" lIns="0" rIns="0" tIns="0" bIns="0" anchor="t"/>
-          <a:lstStyle/>
-          <a:p>
-            <a:pPr algn="l">
-              <a:lnSpc>
-                <a:spcPts val="862"/>
-              </a:lnSpc>
-            </a:pPr>
-            <a:r>
-              <a:rPr sz="750" b="0" i="0" spc="45">
-                <a:solidFill>
-                  <a:srgbClr val="555555"/>
-                </a:solidFill>
-                <a:latin typeface="Futura"/>
-                <a:ea typeface="Futura"/>
-                <a:cs typeface="Futura"/>
-              </a:rPr>
-              <a:t>EQUAL HOUSING</a:t>
-            </a:r>
-          </a:p>
-          <a:p>
-            <a:pPr algn="l">
-              <a:lnSpc>
-                <a:spcPts val="862"/>
-              </a:lnSpc>
-            </a:pPr>
-            <a:r>
-              <a:rPr sz="750" b="0" i="0" spc="45">
-                <a:solidFill>
-                  <a:srgbClr val="555555"/>
-                </a:solidFill>
-                <a:latin typeface="Futura"/>
-                <a:ea typeface="Futura"/>
-                <a:cs typeface="Futura"/>
-              </a:rPr>
-              <a:t>OPPORTUNITY</a:t>
-            </a:r>
-          </a:p>
-        </p:txBody>
-      </p:sp>
-      <p:sp>
-        <p:nvSpPr>
           <p:cNvPr id="39" name="TextBox 38"/>
-          <p:cNvSpPr txBox="1"/>
-          <p:nvPr/>
-        </p:nvSpPr>
-        <p:spPr>
-          <a:xfrm>
-            <a:off x="1969442" y="8930729"/>
-            <a:ext cx="5448481" cy="400050"/>
-          </a:xfrm>
-          <a:prstGeom prst="rect">
-            <a:avLst/>
-          </a:prstGeom>
-          <a:noFill/>
-        </p:spPr>
-        <p:txBody>
-          <a:bodyPr wrap="square" lIns="0" rIns="0" tIns="0" bIns="0" anchor="t"/>
-          <a:lstStyle/>
-          <a:p>
-            <a:pPr algn="l">
-              <a:lnSpc>
-                <a:spcPts val="1012"/>
-              </a:lnSpc>
-            </a:pPr>
-            <a:r>
-              <a:rPr sz="750" b="0" i="0" spc="15">
-                <a:solidFill>
-                  <a:srgbClr val="555555"/>
-                </a:solidFill>
-                <a:latin typeface="Futura"/>
-                <a:ea typeface="Futura"/>
-                <a:cs typeface="Futura"/>
-              </a:rPr>
-              <a:t>CONVENTIONAL FINANCING OFFERED BY EUSTIS MORTGAGE CORPORATION. NOT A COMMITMENT TO LEND. ALL BORROWERS ARE SUBJECT TO CREDIT APPROVAL. RATES AND TERMS MAY CHANGE AT ANYTIME WITHOUT NOTICE. NMLS #70345</a:t>
-            </a:r>
-          </a:p>
-        </p:txBody>
-      </p:sp>
-      <p:sp>
-        <p:nvSpPr>
-          <p:cNvPr id="40" name="TextBox 39"/>
           <p:cNvSpPr txBox="1"/>
           <p:nvPr/>
         </p:nvSpPr>

--- a/alx/The-Alexandre-Flyer-1-Page.pptx
+++ b/alx/The-Alexandre-Flyer-1-Page.pptx
@@ -3762,7 +3762,7 @@
         </p:blipFill>
         <p:spPr>
           <a:xfrm>
-            <a:off x="609600" y="7084665"/>
+            <a:off x="609600" y="7056090"/>
             <a:ext cx="819150" cy="819150"/>
           </a:xfrm>
           <a:prstGeom prst="rect">
@@ -3778,7 +3778,7 @@
         </p:nvSpPr>
         <p:spPr>
           <a:xfrm>
-            <a:off x="1562100" y="6643747"/>
+            <a:off x="1562100" y="6615172"/>
             <a:ext cx="1182022" cy="136207"/>
           </a:xfrm>
           <a:prstGeom prst="rect">
@@ -3817,7 +3817,7 @@
         </p:nvSpPr>
         <p:spPr>
           <a:xfrm>
-            <a:off x="1562100" y="6791369"/>
+            <a:off x="1562100" y="6762794"/>
             <a:ext cx="1867087" cy="272415"/>
           </a:xfrm>
           <a:prstGeom prst="rect">
@@ -3856,7 +3856,7 @@
         </p:nvSpPr>
         <p:spPr>
           <a:xfrm>
-            <a:off x="1562100" y="7078533"/>
+            <a:off x="1562100" y="7049958"/>
             <a:ext cx="1846025" cy="148590"/>
           </a:xfrm>
           <a:prstGeom prst="rect">
@@ -3895,7 +3895,7 @@
         </p:nvSpPr>
         <p:spPr>
           <a:xfrm>
-            <a:off x="1562100" y="7269033"/>
+            <a:off x="1562100" y="7240458"/>
             <a:ext cx="919835" cy="148590"/>
           </a:xfrm>
           <a:prstGeom prst="rect">
@@ -3934,7 +3934,7 @@
         </p:nvSpPr>
         <p:spPr>
           <a:xfrm>
-            <a:off x="1562100" y="7475726"/>
+            <a:off x="1562100" y="7447151"/>
             <a:ext cx="987016" cy="173355"/>
           </a:xfrm>
           <a:prstGeom prst="rect">
@@ -3973,7 +3973,7 @@
         </p:nvSpPr>
         <p:spPr>
           <a:xfrm>
-            <a:off x="1562100" y="7686704"/>
+            <a:off x="1562100" y="7658129"/>
             <a:ext cx="1612889" cy="160972"/>
           </a:xfrm>
           <a:prstGeom prst="rect">
@@ -4020,7 +4020,7 @@
         </p:blipFill>
         <p:spPr>
           <a:xfrm>
-            <a:off x="1562100" y="7971978"/>
+            <a:off x="1562100" y="7943403"/>
             <a:ext cx="999083" cy="381000"/>
           </a:xfrm>
           <a:prstGeom prst="rect">
@@ -4044,7 +4044,7 @@
         </p:blipFill>
         <p:spPr>
           <a:xfrm>
-            <a:off x="3639889" y="7008465"/>
+            <a:off x="3639889" y="6979890"/>
             <a:ext cx="800100" cy="800100"/>
           </a:xfrm>
           <a:prstGeom prst="rect">
@@ -4060,7 +4060,7 @@
         </p:nvSpPr>
         <p:spPr>
           <a:xfrm>
-            <a:off x="3560712" y="7862381"/>
+            <a:off x="3560712" y="7833806"/>
             <a:ext cx="1169312" cy="111442"/>
           </a:xfrm>
           <a:prstGeom prst="rect">
@@ -4099,7 +4099,7 @@
         </p:nvSpPr>
         <p:spPr>
           <a:xfrm>
-            <a:off x="4728716" y="6635650"/>
+            <a:off x="4728716" y="6607075"/>
             <a:ext cx="9525" cy="1717327"/>
           </a:xfrm>
           <a:prstGeom prst="rect">
@@ -4151,7 +4151,7 @@
         </p:blipFill>
         <p:spPr>
           <a:xfrm>
-            <a:off x="4928741" y="6640413"/>
+            <a:off x="4928741" y="6611838"/>
             <a:ext cx="571500" cy="571500"/>
           </a:xfrm>
           <a:prstGeom prst="rect">
@@ -4167,7 +4167,7 @@
         </p:nvSpPr>
         <p:spPr>
           <a:xfrm>
-            <a:off x="5614541" y="6643747"/>
+            <a:off x="5614541" y="6615172"/>
             <a:ext cx="1566951" cy="136207"/>
           </a:xfrm>
           <a:prstGeom prst="rect">
@@ -4206,7 +4206,7 @@
         </p:nvSpPr>
         <p:spPr>
           <a:xfrm>
-            <a:off x="5614541" y="6806624"/>
+            <a:off x="5614541" y="6778049"/>
             <a:ext cx="1518472" cy="210502"/>
           </a:xfrm>
           <a:prstGeom prst="rect">
@@ -4245,7 +4245,7 @@
         </p:nvSpPr>
         <p:spPr>
           <a:xfrm>
-            <a:off x="5614541" y="7045702"/>
+            <a:off x="5614541" y="7017127"/>
             <a:ext cx="885699" cy="160972"/>
           </a:xfrm>
           <a:prstGeom prst="rect">
@@ -4284,7 +4284,7 @@
         </p:nvSpPr>
         <p:spPr>
           <a:xfrm>
-            <a:off x="4928741" y="7293352"/>
+            <a:off x="4928741" y="7264777"/>
             <a:ext cx="2081703" cy="160972"/>
           </a:xfrm>
           <a:prstGeom prst="rect">
@@ -4331,7 +4331,7 @@
         </p:blipFill>
         <p:spPr>
           <a:xfrm>
-            <a:off x="4928741" y="7569100"/>
+            <a:off x="4928741" y="7540525"/>
             <a:ext cx="1272778" cy="400050"/>
           </a:xfrm>
           <a:prstGeom prst="rect">
@@ -4347,7 +4347,7 @@
         </p:nvSpPr>
         <p:spPr>
           <a:xfrm>
-            <a:off x="609600" y="8653075"/>
+            <a:off x="609600" y="8595925"/>
             <a:ext cx="2943436" cy="136207"/>
           </a:xfrm>
           <a:prstGeom prst="rect">
@@ -4386,7 +4386,7 @@
         </p:nvSpPr>
         <p:spPr>
           <a:xfrm>
-            <a:off x="609600" y="8866435"/>
+            <a:off x="609600" y="8809285"/>
             <a:ext cx="3148066" cy="123825"/>
           </a:xfrm>
           <a:prstGeom prst="rect">
@@ -4417,9 +4417,48 @@
           </a:p>
         </p:txBody>
       </p:sp>
+      <p:sp>
+        <p:nvSpPr>
+          <p:cNvPr id="38" name="TextBox 37"/>
+          <p:cNvSpPr txBox="1"/>
+          <p:nvPr/>
+        </p:nvSpPr>
+        <p:spPr>
+          <a:xfrm>
+            <a:off x="609600" y="8992641"/>
+            <a:ext cx="6871614" cy="386655"/>
+          </a:xfrm>
+          <a:prstGeom prst="rect">
+            <a:avLst/>
+          </a:prstGeom>
+          <a:noFill/>
+        </p:spPr>
+        <p:txBody>
+          <a:bodyPr wrap="square" lIns="0" rIns="0" tIns="0" bIns="0" anchor="t"/>
+          <a:lstStyle/>
+          <a:p>
+            <a:pPr algn="l">
+              <a:lnSpc>
+                <a:spcPts val="997"/>
+              </a:lnSpc>
+            </a:pPr>
+            <a:r>
+              <a:rPr sz="712" b="0" i="0">
+                <a:solidFill>
+                  <a:srgbClr val="555555"/>
+                </a:solidFill>
+                <a:latin typeface="Futura"/>
+                <a:ea typeface="Futura"/>
+                <a:cs typeface="Futura"/>
+              </a:rPr>
+              <a:t>Payment example: For a sales price of $365,000 with 5% down, a loan amount of $346,750 on a 30-year fixed conventional loan at a 7.500% interest rate (8.000% APR) would have 360 monthly principal and interest payments of approximately $2,424.53. Payment shown is principal and interest only and excludes taxes, insurance, PMI, and HOA dues; the actual payment will be higher. Rates are for example only, are not a quote, and are subject to change.</a:t>
+            </a:r>
+          </a:p>
+        </p:txBody>
+      </p:sp>
       <p:pic>
         <p:nvPicPr>
-          <p:cNvPr id="38" name="Picture 37" descr="img37.png"/>
+          <p:cNvPr id="39" name="Picture 38" descr="img38.png"/>
           <p:cNvPicPr>
             <a:picLocks noChangeAspect="1"/>
           </p:cNvPicPr>
@@ -4433,7 +4472,7 @@
         </p:blipFill>
         <p:spPr>
           <a:xfrm>
-            <a:off x="609600" y="9040266"/>
+            <a:off x="1404937" y="9486900"/>
             <a:ext cx="4962525" cy="285750"/>
           </a:xfrm>
           <a:prstGeom prst="rect">
@@ -4441,45 +4480,6 @@
           </a:prstGeom>
         </p:spPr>
       </p:pic>
-      <p:sp>
-        <p:nvSpPr>
-          <p:cNvPr id="39" name="TextBox 38"/>
-          <p:cNvSpPr txBox="1"/>
-          <p:nvPr/>
-        </p:nvSpPr>
-        <p:spPr>
-          <a:xfrm>
-            <a:off x="609600" y="9383166"/>
-            <a:ext cx="6871614" cy="386655"/>
-          </a:xfrm>
-          <a:prstGeom prst="rect">
-            <a:avLst/>
-          </a:prstGeom>
-          <a:noFill/>
-        </p:spPr>
-        <p:txBody>
-          <a:bodyPr wrap="square" lIns="0" rIns="0" tIns="0" bIns="0" anchor="t"/>
-          <a:lstStyle/>
-          <a:p>
-            <a:pPr algn="l">
-              <a:lnSpc>
-                <a:spcPts val="997"/>
-              </a:lnSpc>
-            </a:pPr>
-            <a:r>
-              <a:rPr sz="712" b="0" i="0">
-                <a:solidFill>
-                  <a:srgbClr val="555555"/>
-                </a:solidFill>
-                <a:latin typeface="Futura"/>
-                <a:ea typeface="Futura"/>
-                <a:cs typeface="Futura"/>
-              </a:rPr>
-              <a:t>Payment example: For a sales price of $365,000 with 5% down, a loan amount of $346,750 on a 30-year fixed conventional loan at a 7.500% interest rate (8.000% APR) would have 360 monthly principal and interest payments of approximately $2,424.53. Payment shown is principal and interest only and excludes taxes, insurance, PMI, and HOA dues; the actual payment will be higher. Rates are for example only, are not a quote, and are subject to change.</a:t>
-            </a:r>
-          </a:p>
-        </p:txBody>
-      </p:sp>
     </p:spTree>
   </p:cSld>
   <p:clrMapOvr>
